--- a/scripts/reads-ppt/output/anthropic-81k-economics-anthropic.pptx
+++ b/scripts/reads-ppt/output/anthropic-81k-economics-anthropic.pptx
@@ -11044,7 +11044,7 @@
               </a:lnSpc>
             </a:pPr>
             <a:r>
-              <a:rPr sz="4800" b="1" i="0">
+              <a:rPr sz="3600" b="1" i="0">
                 <a:solidFill>
                   <a:srgbClr val="141413"/>
                 </a:solidFill>
@@ -11206,7 +11206,7 @@
               </a:lnSpc>
             </a:pPr>
             <a:r>
-              <a:rPr sz="4800" b="1" i="0">
+              <a:rPr sz="4200" b="1" i="0">
                 <a:solidFill>
                   <a:srgbClr val="141413"/>
                 </a:solidFill>
@@ -11530,7 +11530,7 @@
               </a:lnSpc>
             </a:pPr>
             <a:r>
-              <a:rPr sz="4400" b="1" i="0">
+              <a:rPr sz="2600" b="1" i="0">
                 <a:solidFill>
                   <a:srgbClr val="141413"/>
                 </a:solidFill>

--- a/scripts/reads-ppt/output/anthropic-81k-economics-anthropic.pptx
+++ b/scripts/reads-ppt/output/anthropic-81k-economics-anthropic.pptx
@@ -4979,7 +4979,7 @@
               </a:lnSpc>
             </a:pPr>
             <a:r>
-              <a:rPr sz="1600" b="1" i="0">
+              <a:rPr sz="1400" b="1" i="0">
                 <a:solidFill>
                   <a:srgbClr val="141413"/>
                 </a:solidFill>
@@ -5262,7 +5262,7 @@
               </a:lnSpc>
             </a:pPr>
             <a:r>
-              <a:rPr sz="1600" b="1" i="0">
+              <a:rPr sz="1400" b="1" i="0">
                 <a:solidFill>
                   <a:srgbClr val="141413"/>
                 </a:solidFill>
@@ -6570,7 +6570,7 @@
               </a:lnSpc>
             </a:pPr>
             <a:r>
-              <a:rPr sz="1300" b="1" i="0">
+              <a:rPr sz="1100" b="1" i="0">
                 <a:solidFill>
                   <a:srgbClr val="141413"/>
                 </a:solidFill>
@@ -6812,7 +6812,7 @@
               </a:lnSpc>
             </a:pPr>
             <a:r>
-              <a:rPr sz="1300" b="1" i="0">
+              <a:rPr sz="1100" b="1" i="0">
                 <a:solidFill>
                   <a:srgbClr val="141413"/>
                 </a:solidFill>
@@ -7054,7 +7054,7 @@
               </a:lnSpc>
             </a:pPr>
             <a:r>
-              <a:rPr sz="1300" b="1" i="0">
+              <a:rPr sz="1100" b="1" i="0">
                 <a:solidFill>
                   <a:srgbClr val="141413"/>
                 </a:solidFill>
@@ -7296,7 +7296,7 @@
               </a:lnSpc>
             </a:pPr>
             <a:r>
-              <a:rPr sz="1300" b="1" i="0">
+              <a:rPr sz="1100" b="1" i="0">
                 <a:solidFill>
                   <a:srgbClr val="141413"/>
                 </a:solidFill>
@@ -7538,7 +7538,7 @@
               </a:lnSpc>
             </a:pPr>
             <a:r>
-              <a:rPr sz="1300" b="1" i="0">
+              <a:rPr sz="1100" b="1" i="0">
                 <a:solidFill>
                   <a:srgbClr val="141413"/>
                 </a:solidFill>
@@ -11044,7 +11044,7 @@
               </a:lnSpc>
             </a:pPr>
             <a:r>
-              <a:rPr sz="3600" b="1" i="0">
+              <a:rPr sz="2600" b="1" i="0">
                 <a:solidFill>
                   <a:srgbClr val="141413"/>
                 </a:solidFill>
@@ -11206,7 +11206,7 @@
               </a:lnSpc>
             </a:pPr>
             <a:r>
-              <a:rPr sz="4200" b="1" i="0">
+              <a:rPr sz="2600" b="1" i="0">
                 <a:solidFill>
                   <a:srgbClr val="141413"/>
                 </a:solidFill>
@@ -11368,7 +11368,7 @@
               </a:lnSpc>
             </a:pPr>
             <a:r>
-              <a:rPr sz="4800" b="1" i="0">
+              <a:rPr sz="2600" b="1" i="0">
                 <a:solidFill>
                   <a:srgbClr val="141413"/>
                 </a:solidFill>
@@ -15169,7 +15169,7 @@
               </a:lnSpc>
             </a:pPr>
             <a:r>
-              <a:rPr sz="2200" b="1" i="0">
+              <a:rPr sz="2400" b="1" i="0">
                 <a:solidFill>
                   <a:srgbClr val="141413"/>
                 </a:solidFill>
@@ -15462,7 +15462,7 @@
               </a:lnSpc>
             </a:pPr>
             <a:r>
-              <a:rPr sz="2200" b="1" i="0">
+              <a:rPr sz="2400" b="1" i="0">
                 <a:solidFill>
                   <a:srgbClr val="141413"/>
                 </a:solidFill>

--- a/scripts/reads-ppt/output/anthropic-81k-economics-anthropic.pptx
+++ b/scripts/reads-ppt/output/anthropic-81k-economics-anthropic.pptx
@@ -6470,8 +6470,8 @@
         </p:nvSpPr>
         <p:spPr>
           <a:xfrm>
-            <a:off x="640080" y="3520440"/>
-            <a:ext cx="777240" cy="548640"/>
+            <a:off x="640080" y="3337560"/>
+            <a:ext cx="777240" cy="612648"/>
           </a:xfrm>
           <a:prstGeom prst="rect">
             <a:avLst/>
@@ -6505,8 +6505,8 @@
         </p:nvSpPr>
         <p:spPr>
           <a:xfrm>
-            <a:off x="1417320" y="3611880"/>
-            <a:ext cx="19050" cy="365760"/>
+            <a:off x="1417320" y="3429000"/>
+            <a:ext cx="19050" cy="429768"/>
           </a:xfrm>
           <a:prstGeom prst="rect">
             <a:avLst/>
@@ -6550,8 +6550,8 @@
         </p:nvSpPr>
         <p:spPr>
           <a:xfrm>
-            <a:off x="1691640" y="3520440"/>
-            <a:ext cx="3200400" cy="548640"/>
+            <a:off x="1691640" y="3337560"/>
+            <a:ext cx="3200400" cy="612648"/>
           </a:xfrm>
           <a:prstGeom prst="rect">
             <a:avLst/>
@@ -6589,8 +6589,8 @@
         </p:nvSpPr>
         <p:spPr>
           <a:xfrm>
-            <a:off x="5074920" y="3520440"/>
-            <a:ext cx="3931920" cy="548640"/>
+            <a:off x="5074920" y="3337560"/>
+            <a:ext cx="3931920" cy="612648"/>
           </a:xfrm>
           <a:prstGeom prst="rect">
             <a:avLst/>
@@ -6605,11 +6605,11 @@
           <a:p>
             <a:pPr algn="l">
               <a:lnSpc>
-                <a:spcPct val="132000"/>
+                <a:spcPct val="128000"/>
               </a:lnSpc>
             </a:pPr>
             <a:r>
-              <a:rPr sz="1100" b="0" i="0">
+              <a:rPr sz="1000" b="0" i="0">
                 <a:solidFill>
                   <a:srgbClr val="141413"/>
                 </a:solidFill>
@@ -6628,8 +6628,8 @@
         </p:nvSpPr>
         <p:spPr>
           <a:xfrm>
-            <a:off x="9189720" y="3520440"/>
-            <a:ext cx="2286000" cy="548640"/>
+            <a:off x="9189720" y="3337560"/>
+            <a:ext cx="2286000" cy="612648"/>
           </a:xfrm>
           <a:prstGeom prst="rect">
             <a:avLst/>
@@ -6644,11 +6644,11 @@
           <a:p>
             <a:pPr algn="l">
               <a:lnSpc>
-                <a:spcPct val="130000"/>
+                <a:spcPct val="128000"/>
               </a:lnSpc>
             </a:pPr>
             <a:r>
-              <a:rPr sz="1000" b="0" i="1">
+              <a:rPr sz="900" b="0" i="1">
                 <a:solidFill>
                   <a:srgbClr val="D97757"/>
                 </a:solidFill>
@@ -6667,7 +6667,7 @@
         </p:nvSpPr>
         <p:spPr>
           <a:xfrm>
-            <a:off x="640080" y="4061460"/>
+            <a:off x="640080" y="3942588"/>
             <a:ext cx="10911535" cy="6350"/>
           </a:xfrm>
           <a:prstGeom prst="rect">
@@ -6712,8 +6712,8 @@
         </p:nvSpPr>
         <p:spPr>
           <a:xfrm>
-            <a:off x="640080" y="4069080"/>
-            <a:ext cx="777240" cy="548640"/>
+            <a:off x="640080" y="3950208"/>
+            <a:ext cx="777240" cy="612648"/>
           </a:xfrm>
           <a:prstGeom prst="rect">
             <a:avLst/>
@@ -6747,8 +6747,8 @@
         </p:nvSpPr>
         <p:spPr>
           <a:xfrm>
-            <a:off x="1417320" y="4160520"/>
-            <a:ext cx="19050" cy="365760"/>
+            <a:off x="1417320" y="4041648"/>
+            <a:ext cx="19050" cy="429768"/>
           </a:xfrm>
           <a:prstGeom prst="rect">
             <a:avLst/>
@@ -6792,8 +6792,8 @@
         </p:nvSpPr>
         <p:spPr>
           <a:xfrm>
-            <a:off x="1691640" y="4069080"/>
-            <a:ext cx="3200400" cy="548640"/>
+            <a:off x="1691640" y="3950208"/>
+            <a:ext cx="3200400" cy="612648"/>
           </a:xfrm>
           <a:prstGeom prst="rect">
             <a:avLst/>
@@ -6831,8 +6831,8 @@
         </p:nvSpPr>
         <p:spPr>
           <a:xfrm>
-            <a:off x="5074920" y="4069080"/>
-            <a:ext cx="3931920" cy="548640"/>
+            <a:off x="5074920" y="3950208"/>
+            <a:ext cx="3931920" cy="612648"/>
           </a:xfrm>
           <a:prstGeom prst="rect">
             <a:avLst/>
@@ -6847,11 +6847,11 @@
           <a:p>
             <a:pPr algn="l">
               <a:lnSpc>
-                <a:spcPct val="132000"/>
+                <a:spcPct val="128000"/>
               </a:lnSpc>
             </a:pPr>
             <a:r>
-              <a:rPr sz="1100" b="0" i="0">
+              <a:rPr sz="1000" b="0" i="0">
                 <a:solidFill>
                   <a:srgbClr val="141413"/>
                 </a:solidFill>
@@ -6870,8 +6870,8 @@
         </p:nvSpPr>
         <p:spPr>
           <a:xfrm>
-            <a:off x="9189720" y="4069080"/>
-            <a:ext cx="2286000" cy="548640"/>
+            <a:off x="9189720" y="3950208"/>
+            <a:ext cx="2286000" cy="612648"/>
           </a:xfrm>
           <a:prstGeom prst="rect">
             <a:avLst/>
@@ -6886,11 +6886,11 @@
           <a:p>
             <a:pPr algn="l">
               <a:lnSpc>
-                <a:spcPct val="130000"/>
+                <a:spcPct val="128000"/>
               </a:lnSpc>
             </a:pPr>
             <a:r>
-              <a:rPr sz="1000" b="0" i="1">
+              <a:rPr sz="900" b="0" i="1">
                 <a:solidFill>
                   <a:srgbClr val="6A9BCC"/>
                 </a:solidFill>
@@ -6909,7 +6909,7 @@
         </p:nvSpPr>
         <p:spPr>
           <a:xfrm>
-            <a:off x="640080" y="4610100"/>
+            <a:off x="640080" y="4555236"/>
             <a:ext cx="10911535" cy="6350"/>
           </a:xfrm>
           <a:prstGeom prst="rect">
@@ -6954,8 +6954,8 @@
         </p:nvSpPr>
         <p:spPr>
           <a:xfrm>
-            <a:off x="640080" y="4617720"/>
-            <a:ext cx="777240" cy="548640"/>
+            <a:off x="640080" y="4562856"/>
+            <a:ext cx="777240" cy="612648"/>
           </a:xfrm>
           <a:prstGeom prst="rect">
             <a:avLst/>
@@ -6989,8 +6989,8 @@
         </p:nvSpPr>
         <p:spPr>
           <a:xfrm>
-            <a:off x="1417320" y="4709160"/>
-            <a:ext cx="19050" cy="365760"/>
+            <a:off x="1417320" y="4654296"/>
+            <a:ext cx="19050" cy="429768"/>
           </a:xfrm>
           <a:prstGeom prst="rect">
             <a:avLst/>
@@ -7034,8 +7034,8 @@
         </p:nvSpPr>
         <p:spPr>
           <a:xfrm>
-            <a:off x="1691640" y="4617720"/>
-            <a:ext cx="3200400" cy="548640"/>
+            <a:off x="1691640" y="4562856"/>
+            <a:ext cx="3200400" cy="612648"/>
           </a:xfrm>
           <a:prstGeom prst="rect">
             <a:avLst/>
@@ -7073,8 +7073,8 @@
         </p:nvSpPr>
         <p:spPr>
           <a:xfrm>
-            <a:off x="5074920" y="4617720"/>
-            <a:ext cx="3931920" cy="548640"/>
+            <a:off x="5074920" y="4562856"/>
+            <a:ext cx="3931920" cy="612648"/>
           </a:xfrm>
           <a:prstGeom prst="rect">
             <a:avLst/>
@@ -7089,11 +7089,11 @@
           <a:p>
             <a:pPr algn="l">
               <a:lnSpc>
-                <a:spcPct val="132000"/>
+                <a:spcPct val="128000"/>
               </a:lnSpc>
             </a:pPr>
             <a:r>
-              <a:rPr sz="1100" b="0" i="0">
+              <a:rPr sz="1000" b="0" i="0">
                 <a:solidFill>
                   <a:srgbClr val="141413"/>
                 </a:solidFill>
@@ -7112,8 +7112,8 @@
         </p:nvSpPr>
         <p:spPr>
           <a:xfrm>
-            <a:off x="9189720" y="4617720"/>
-            <a:ext cx="2286000" cy="548640"/>
+            <a:off x="9189720" y="4562856"/>
+            <a:ext cx="2286000" cy="612648"/>
           </a:xfrm>
           <a:prstGeom prst="rect">
             <a:avLst/>
@@ -7128,11 +7128,11 @@
           <a:p>
             <a:pPr algn="l">
               <a:lnSpc>
-                <a:spcPct val="130000"/>
+                <a:spcPct val="128000"/>
               </a:lnSpc>
             </a:pPr>
             <a:r>
-              <a:rPr sz="1000" b="0" i="1">
+              <a:rPr sz="900" b="0" i="1">
                 <a:solidFill>
                   <a:srgbClr val="788C5D"/>
                 </a:solidFill>
@@ -7151,7 +7151,7 @@
         </p:nvSpPr>
         <p:spPr>
           <a:xfrm>
-            <a:off x="640080" y="5158740"/>
+            <a:off x="640080" y="5167884"/>
             <a:ext cx="10911535" cy="6350"/>
           </a:xfrm>
           <a:prstGeom prst="rect">
@@ -7196,8 +7196,8 @@
         </p:nvSpPr>
         <p:spPr>
           <a:xfrm>
-            <a:off x="640080" y="5166360"/>
-            <a:ext cx="777240" cy="548640"/>
+            <a:off x="640080" y="5175504"/>
+            <a:ext cx="777240" cy="612648"/>
           </a:xfrm>
           <a:prstGeom prst="rect">
             <a:avLst/>
@@ -7231,8 +7231,8 @@
         </p:nvSpPr>
         <p:spPr>
           <a:xfrm>
-            <a:off x="1417320" y="5257800"/>
-            <a:ext cx="19050" cy="365760"/>
+            <a:off x="1417320" y="5266944"/>
+            <a:ext cx="19050" cy="429768"/>
           </a:xfrm>
           <a:prstGeom prst="rect">
             <a:avLst/>
@@ -7276,8 +7276,8 @@
         </p:nvSpPr>
         <p:spPr>
           <a:xfrm>
-            <a:off x="1691640" y="5166360"/>
-            <a:ext cx="3200400" cy="548640"/>
+            <a:off x="1691640" y="5175504"/>
+            <a:ext cx="3200400" cy="612648"/>
           </a:xfrm>
           <a:prstGeom prst="rect">
             <a:avLst/>
@@ -7315,8 +7315,8 @@
         </p:nvSpPr>
         <p:spPr>
           <a:xfrm>
-            <a:off x="5074920" y="5166360"/>
-            <a:ext cx="3931920" cy="548640"/>
+            <a:off x="5074920" y="5175504"/>
+            <a:ext cx="3931920" cy="612648"/>
           </a:xfrm>
           <a:prstGeom prst="rect">
             <a:avLst/>
@@ -7331,11 +7331,11 @@
           <a:p>
             <a:pPr algn="l">
               <a:lnSpc>
-                <a:spcPct val="132000"/>
+                <a:spcPct val="128000"/>
               </a:lnSpc>
             </a:pPr>
             <a:r>
-              <a:rPr sz="1100" b="0" i="0">
+              <a:rPr sz="1000" b="0" i="0">
                 <a:solidFill>
                   <a:srgbClr val="141413"/>
                 </a:solidFill>
@@ -7354,8 +7354,8 @@
         </p:nvSpPr>
         <p:spPr>
           <a:xfrm>
-            <a:off x="9189720" y="5166360"/>
-            <a:ext cx="2286000" cy="548640"/>
+            <a:off x="9189720" y="5175504"/>
+            <a:ext cx="2286000" cy="612648"/>
           </a:xfrm>
           <a:prstGeom prst="rect">
             <a:avLst/>
@@ -7370,11 +7370,11 @@
           <a:p>
             <a:pPr algn="l">
               <a:lnSpc>
-                <a:spcPct val="130000"/>
+                <a:spcPct val="128000"/>
               </a:lnSpc>
             </a:pPr>
             <a:r>
-              <a:rPr sz="1000" b="0" i="1">
+              <a:rPr sz="900" b="0" i="1">
                 <a:solidFill>
                   <a:srgbClr val="D97757"/>
                 </a:solidFill>
@@ -7393,7 +7393,7 @@
         </p:nvSpPr>
         <p:spPr>
           <a:xfrm>
-            <a:off x="640080" y="5707380"/>
+            <a:off x="640080" y="5780532"/>
             <a:ext cx="10911535" cy="6350"/>
           </a:xfrm>
           <a:prstGeom prst="rect">
@@ -7438,8 +7438,8 @@
         </p:nvSpPr>
         <p:spPr>
           <a:xfrm>
-            <a:off x="640080" y="5715000"/>
-            <a:ext cx="777240" cy="548640"/>
+            <a:off x="640080" y="5788152"/>
+            <a:ext cx="777240" cy="612648"/>
           </a:xfrm>
           <a:prstGeom prst="rect">
             <a:avLst/>
@@ -7473,8 +7473,8 @@
         </p:nvSpPr>
         <p:spPr>
           <a:xfrm>
-            <a:off x="1417320" y="5806440"/>
-            <a:ext cx="19050" cy="365760"/>
+            <a:off x="1417320" y="5879592"/>
+            <a:ext cx="19050" cy="429768"/>
           </a:xfrm>
           <a:prstGeom prst="rect">
             <a:avLst/>
@@ -7518,8 +7518,8 @@
         </p:nvSpPr>
         <p:spPr>
           <a:xfrm>
-            <a:off x="1691640" y="5715000"/>
-            <a:ext cx="3200400" cy="548640"/>
+            <a:off x="1691640" y="5788152"/>
+            <a:ext cx="3200400" cy="612648"/>
           </a:xfrm>
           <a:prstGeom prst="rect">
             <a:avLst/>
@@ -7557,8 +7557,8 @@
         </p:nvSpPr>
         <p:spPr>
           <a:xfrm>
-            <a:off x="5074920" y="5715000"/>
-            <a:ext cx="3931920" cy="548640"/>
+            <a:off x="5074920" y="5788152"/>
+            <a:ext cx="3931920" cy="612648"/>
           </a:xfrm>
           <a:prstGeom prst="rect">
             <a:avLst/>
@@ -7573,11 +7573,11 @@
           <a:p>
             <a:pPr algn="l">
               <a:lnSpc>
-                <a:spcPct val="132000"/>
+                <a:spcPct val="128000"/>
               </a:lnSpc>
             </a:pPr>
             <a:r>
-              <a:rPr sz="1100" b="0" i="0">
+              <a:rPr sz="1000" b="0" i="0">
                 <a:solidFill>
                   <a:srgbClr val="141413"/>
                 </a:solidFill>
@@ -7596,8 +7596,8 @@
         </p:nvSpPr>
         <p:spPr>
           <a:xfrm>
-            <a:off x="9189720" y="5715000"/>
-            <a:ext cx="2286000" cy="548640"/>
+            <a:off x="9189720" y="5788152"/>
+            <a:ext cx="2286000" cy="612648"/>
           </a:xfrm>
           <a:prstGeom prst="rect">
             <a:avLst/>
@@ -7612,11 +7612,11 @@
           <a:p>
             <a:pPr algn="l">
               <a:lnSpc>
-                <a:spcPct val="130000"/>
+                <a:spcPct val="128000"/>
               </a:lnSpc>
             </a:pPr>
             <a:r>
-              <a:rPr sz="1000" b="0" i="1">
+              <a:rPr sz="900" b="0" i="1">
                 <a:solidFill>
                   <a:srgbClr val="6A9BCC"/>
                 </a:solidFill>
@@ -7635,7 +7635,7 @@
         </p:nvSpPr>
         <p:spPr>
           <a:xfrm>
-            <a:off x="640080" y="6256020"/>
+            <a:off x="640080" y="6393180"/>
             <a:ext cx="10911535" cy="6350"/>
           </a:xfrm>
           <a:prstGeom prst="rect">
